--- a/Main/Study/First Sem/All Notes and Resources Combined/NN Notes/Unit -7 Recurrent Neural Network.pptx
+++ b/Main/Study/First Sem/All Notes and Resources Combined/NN Notes/Unit -7 Recurrent Neural Network.pptx
@@ -172,8 +172,8 @@
 <pc:chgInfo xmlns:a="http://schemas.openxmlformats.org/drawingml/2006/main" xmlns:r="http://schemas.openxmlformats.org/officeDocument/2006/relationships" xmlns:ac="http://schemas.microsoft.com/office/drawing/2013/main/command" xmlns:pc="http://schemas.microsoft.com/office/powerpoint/2013/main/command">
   <pc:docChgLst>
     <pc:chgData name="Yujan Basnet" userId="495fd8277ebfbaef" providerId="LiveId" clId="{2A6D430E-303F-4B28-82F9-0BAD31583843}"/>
-    <pc:docChg chg="modSld">
-      <pc:chgData name="Yujan Basnet" userId="495fd8277ebfbaef" providerId="LiveId" clId="{2A6D430E-303F-4B28-82F9-0BAD31583843}" dt="2025-06-14T03:47:25.324" v="30" actId="207"/>
+    <pc:docChg chg="undo custSel modSld">
+      <pc:chgData name="Yujan Basnet" userId="495fd8277ebfbaef" providerId="LiveId" clId="{2A6D430E-303F-4B28-82F9-0BAD31583843}" dt="2025-06-28T03:58:31.057" v="53" actId="368"/>
       <pc:docMkLst>
         <pc:docMk/>
       </pc:docMkLst>
@@ -216,7 +216,7 @@
         </pc:spChg>
       </pc:sldChg>
       <pc:sldChg chg="addSp modSp mod">
-        <pc:chgData name="Yujan Basnet" userId="495fd8277ebfbaef" providerId="LiveId" clId="{2A6D430E-303F-4B28-82F9-0BAD31583843}" dt="2025-06-14T03:46:13.974" v="28" actId="1076"/>
+        <pc:chgData name="Yujan Basnet" userId="495fd8277ebfbaef" providerId="LiveId" clId="{2A6D430E-303F-4B28-82F9-0BAD31583843}" dt="2025-06-27T23:28:37.233" v="36" actId="207"/>
         <pc:sldMkLst>
           <pc:docMk/>
           <pc:sldMk cId="1795160745" sldId="316"/>
@@ -230,10 +230,25 @@
           </ac:spMkLst>
         </pc:spChg>
         <pc:spChg chg="mod">
-          <ac:chgData name="Yujan Basnet" userId="495fd8277ebfbaef" providerId="LiveId" clId="{2A6D430E-303F-4B28-82F9-0BAD31583843}" dt="2025-06-14T03:45:23.649" v="26" actId="207"/>
+          <ac:chgData name="Yujan Basnet" userId="495fd8277ebfbaef" providerId="LiveId" clId="{2A6D430E-303F-4B28-82F9-0BAD31583843}" dt="2025-06-27T23:28:37.233" v="36" actId="207"/>
           <ac:spMkLst>
             <pc:docMk/>
             <pc:sldMk cId="1795160745" sldId="316"/>
+            <ac:spMk id="5" creationId="{00000000-0000-0000-0000-000000000000}"/>
+          </ac:spMkLst>
+        </pc:spChg>
+      </pc:sldChg>
+      <pc:sldChg chg="modSp mod">
+        <pc:chgData name="Yujan Basnet" userId="495fd8277ebfbaef" providerId="LiveId" clId="{2A6D430E-303F-4B28-82F9-0BAD31583843}" dt="2025-06-27T23:44:09.540" v="38" actId="207"/>
+        <pc:sldMkLst>
+          <pc:docMk/>
+          <pc:sldMk cId="1795160745" sldId="322"/>
+        </pc:sldMkLst>
+        <pc:spChg chg="mod">
+          <ac:chgData name="Yujan Basnet" userId="495fd8277ebfbaef" providerId="LiveId" clId="{2A6D430E-303F-4B28-82F9-0BAD31583843}" dt="2025-06-27T23:44:09.540" v="38" actId="207"/>
+          <ac:spMkLst>
+            <pc:docMk/>
+            <pc:sldMk cId="1795160745" sldId="322"/>
             <ac:spMk id="5" creationId="{00000000-0000-0000-0000-000000000000}"/>
           </ac:spMkLst>
         </pc:spChg>
@@ -264,6 +279,51 @@
           <ac:spMkLst>
             <pc:docMk/>
             <pc:sldMk cId="1795160745" sldId="334"/>
+            <ac:spMk id="5" creationId="{00000000-0000-0000-0000-000000000000}"/>
+          </ac:spMkLst>
+        </pc:spChg>
+      </pc:sldChg>
+      <pc:sldChg chg="modSp mod">
+        <pc:chgData name="Yujan Basnet" userId="495fd8277ebfbaef" providerId="LiveId" clId="{2A6D430E-303F-4B28-82F9-0BAD31583843}" dt="2025-06-28T01:20:12.523" v="46" actId="207"/>
+        <pc:sldMkLst>
+          <pc:docMk/>
+          <pc:sldMk cId="1795160745" sldId="340"/>
+        </pc:sldMkLst>
+        <pc:spChg chg="mod">
+          <ac:chgData name="Yujan Basnet" userId="495fd8277ebfbaef" providerId="LiveId" clId="{2A6D430E-303F-4B28-82F9-0BAD31583843}" dt="2025-06-28T01:20:12.523" v="46" actId="207"/>
+          <ac:spMkLst>
+            <pc:docMk/>
+            <pc:sldMk cId="1795160745" sldId="340"/>
+            <ac:spMk id="5" creationId="{00000000-0000-0000-0000-000000000000}"/>
+          </ac:spMkLst>
+        </pc:spChg>
+      </pc:sldChg>
+      <pc:sldChg chg="modSp mod">
+        <pc:chgData name="Yujan Basnet" userId="495fd8277ebfbaef" providerId="LiveId" clId="{2A6D430E-303F-4B28-82F9-0BAD31583843}" dt="2025-06-28T01:48:11.782" v="49" actId="207"/>
+        <pc:sldMkLst>
+          <pc:docMk/>
+          <pc:sldMk cId="1795160745" sldId="345"/>
+        </pc:sldMkLst>
+        <pc:spChg chg="mod">
+          <ac:chgData name="Yujan Basnet" userId="495fd8277ebfbaef" providerId="LiveId" clId="{2A6D430E-303F-4B28-82F9-0BAD31583843}" dt="2025-06-28T01:48:11.782" v="49" actId="207"/>
+          <ac:spMkLst>
+            <pc:docMk/>
+            <pc:sldMk cId="1795160745" sldId="345"/>
+            <ac:spMk id="5" creationId="{00000000-0000-0000-0000-000000000000}"/>
+          </ac:spMkLst>
+        </pc:spChg>
+      </pc:sldChg>
+      <pc:sldChg chg="modSp mod">
+        <pc:chgData name="Yujan Basnet" userId="495fd8277ebfbaef" providerId="LiveId" clId="{2A6D430E-303F-4B28-82F9-0BAD31583843}" dt="2025-06-28T03:58:31.057" v="53" actId="368"/>
+        <pc:sldMkLst>
+          <pc:docMk/>
+          <pc:sldMk cId="1795160745" sldId="349"/>
+        </pc:sldMkLst>
+        <pc:spChg chg="mod">
+          <ac:chgData name="Yujan Basnet" userId="495fd8277ebfbaef" providerId="LiveId" clId="{2A6D430E-303F-4B28-82F9-0BAD31583843}" dt="2025-06-28T03:58:31.057" v="53" actId="368"/>
+          <ac:spMkLst>
+            <pc:docMk/>
+            <pc:sldMk cId="1795160745" sldId="349"/>
             <ac:spMk id="5" creationId="{00000000-0000-0000-0000-000000000000}"/>
           </ac:spMkLst>
         </pc:spChg>
@@ -356,7 +416,7 @@
             <a:fld id="{226EBE57-06B5-493A-882E-E27946C0749C}" type="datetimeFigureOut">
               <a:rPr lang="en-US" smtClean="0"/>
               <a:pPr/>
-              <a:t>6/14/2025</a:t>
+              <a:t>6/28/2025</a:t>
             </a:fld>
             <a:endParaRPr lang="en-US"/>
           </a:p>
@@ -806,7 +866,7 @@
             <a:fld id="{08295401-A47B-4E13-8BC9-23B87DDAB279}" type="datetimeFigureOut">
               <a:rPr lang="en-US" smtClean="0"/>
               <a:pPr/>
-              <a:t>6/14/2025</a:t>
+              <a:t>6/28/2025</a:t>
             </a:fld>
             <a:endParaRPr lang="en-US"/>
           </a:p>
@@ -972,7 +1032,7 @@
             <a:fld id="{08295401-A47B-4E13-8BC9-23B87DDAB279}" type="datetimeFigureOut">
               <a:rPr lang="en-US" smtClean="0"/>
               <a:pPr/>
-              <a:t>6/14/2025</a:t>
+              <a:t>6/28/2025</a:t>
             </a:fld>
             <a:endParaRPr lang="en-US"/>
           </a:p>
@@ -1148,7 +1208,7 @@
             <a:fld id="{08295401-A47B-4E13-8BC9-23B87DDAB279}" type="datetimeFigureOut">
               <a:rPr lang="en-US" smtClean="0"/>
               <a:pPr/>
-              <a:t>6/14/2025</a:t>
+              <a:t>6/28/2025</a:t>
             </a:fld>
             <a:endParaRPr lang="en-US"/>
           </a:p>
@@ -1314,7 +1374,7 @@
             <a:fld id="{08295401-A47B-4E13-8BC9-23B87DDAB279}" type="datetimeFigureOut">
               <a:rPr lang="en-US" smtClean="0"/>
               <a:pPr/>
-              <a:t>6/14/2025</a:t>
+              <a:t>6/28/2025</a:t>
             </a:fld>
             <a:endParaRPr lang="en-US"/>
           </a:p>
@@ -1557,7 +1617,7 @@
             <a:fld id="{08295401-A47B-4E13-8BC9-23B87DDAB279}" type="datetimeFigureOut">
               <a:rPr lang="en-US" smtClean="0"/>
               <a:pPr/>
-              <a:t>6/14/2025</a:t>
+              <a:t>6/28/2025</a:t>
             </a:fld>
             <a:endParaRPr lang="en-US"/>
           </a:p>
@@ -1840,7 +1900,7 @@
             <a:fld id="{08295401-A47B-4E13-8BC9-23B87DDAB279}" type="datetimeFigureOut">
               <a:rPr lang="en-US" smtClean="0"/>
               <a:pPr/>
-              <a:t>6/14/2025</a:t>
+              <a:t>6/28/2025</a:t>
             </a:fld>
             <a:endParaRPr lang="en-US"/>
           </a:p>
@@ -2257,7 +2317,7 @@
             <a:fld id="{08295401-A47B-4E13-8BC9-23B87DDAB279}" type="datetimeFigureOut">
               <a:rPr lang="en-US" smtClean="0"/>
               <a:pPr/>
-              <a:t>6/14/2025</a:t>
+              <a:t>6/28/2025</a:t>
             </a:fld>
             <a:endParaRPr lang="en-US"/>
           </a:p>
@@ -2372,7 +2432,7 @@
             <a:fld id="{08295401-A47B-4E13-8BC9-23B87DDAB279}" type="datetimeFigureOut">
               <a:rPr lang="en-US" smtClean="0"/>
               <a:pPr/>
-              <a:t>6/14/2025</a:t>
+              <a:t>6/28/2025</a:t>
             </a:fld>
             <a:endParaRPr lang="en-US"/>
           </a:p>
@@ -2465,7 +2525,7 @@
             <a:fld id="{08295401-A47B-4E13-8BC9-23B87DDAB279}" type="datetimeFigureOut">
               <a:rPr lang="en-US" smtClean="0"/>
               <a:pPr/>
-              <a:t>6/14/2025</a:t>
+              <a:t>6/28/2025</a:t>
             </a:fld>
             <a:endParaRPr lang="en-US"/>
           </a:p>
@@ -2738,7 +2798,7 @@
             <a:fld id="{08295401-A47B-4E13-8BC9-23B87DDAB279}" type="datetimeFigureOut">
               <a:rPr lang="en-US" smtClean="0"/>
               <a:pPr/>
-              <a:t>6/14/2025</a:t>
+              <a:t>6/28/2025</a:t>
             </a:fld>
             <a:endParaRPr lang="en-US"/>
           </a:p>
@@ -2988,7 +3048,7 @@
             <a:fld id="{08295401-A47B-4E13-8BC9-23B87DDAB279}" type="datetimeFigureOut">
               <a:rPr lang="en-US" smtClean="0"/>
               <a:pPr/>
-              <a:t>6/14/2025</a:t>
+              <a:t>6/28/2025</a:t>
             </a:fld>
             <a:endParaRPr lang="en-US"/>
           </a:p>
@@ -3197,7 +3257,7 @@
             <a:fld id="{08295401-A47B-4E13-8BC9-23B87DDAB279}" type="datetimeFigureOut">
               <a:rPr lang="en-US" smtClean="0"/>
               <a:pPr/>
-              <a:t>6/14/2025</a:t>
+              <a:t>6/28/2025</a:t>
             </a:fld>
             <a:endParaRPr lang="en-US"/>
           </a:p>
@@ -3724,7 +3784,67 @@
               <a:rPr lang="en-US" sz="2400" dirty="0">
                 <a:latin typeface="Book Antiqua" pitchFamily="18" charset="0"/>
               </a:rPr>
-              <a:t> Consider the input series {0.2,0.4,0.6, 0.8}. Show forward propagation of RNN with two nodes in hidden layer to predict next term in the series. Assume that activation function of hidden layer is sigmoid and activation in output layer is linear. </a:t>
+              <a:t> Consider the input series </a:t>
+            </a:r>
+            <a:r>
+              <a:rPr lang="en-US" sz="2400" dirty="0">
+                <a:solidFill>
+                  <a:srgbClr val="FF0000"/>
+                </a:solidFill>
+                <a:latin typeface="Book Antiqua" pitchFamily="18" charset="0"/>
+              </a:rPr>
+              <a:t>{0.2,0.4,0.6, 0.8}. </a:t>
+            </a:r>
+            <a:r>
+              <a:rPr lang="en-US" sz="2400" dirty="0">
+                <a:latin typeface="Book Antiqua" pitchFamily="18" charset="0"/>
+              </a:rPr>
+              <a:t>Show forward propagation of RNN with </a:t>
+            </a:r>
+            <a:r>
+              <a:rPr lang="en-US" sz="2400" dirty="0">
+                <a:solidFill>
+                  <a:srgbClr val="FF0000"/>
+                </a:solidFill>
+                <a:latin typeface="Book Antiqua" pitchFamily="18" charset="0"/>
+              </a:rPr>
+              <a:t>two nodes </a:t>
+            </a:r>
+            <a:r>
+              <a:rPr lang="en-US" sz="2400" dirty="0">
+                <a:latin typeface="Book Antiqua" pitchFamily="18" charset="0"/>
+              </a:rPr>
+              <a:t>in hidden layer to predict next term in the series. Assume that activation function of hidden layer is </a:t>
+            </a:r>
+            <a:r>
+              <a:rPr lang="en-US" sz="2400" dirty="0">
+                <a:solidFill>
+                  <a:srgbClr val="00B050"/>
+                </a:solidFill>
+                <a:latin typeface="Book Antiqua" pitchFamily="18" charset="0"/>
+              </a:rPr>
+              <a:t>sigmoid</a:t>
+            </a:r>
+            <a:r>
+              <a:rPr lang="en-US" sz="2400" dirty="0">
+                <a:latin typeface="Book Antiqua" pitchFamily="18" charset="0"/>
+              </a:rPr>
+              <a:t> and activation in output layer is </a:t>
+            </a:r>
+            <a:r>
+              <a:rPr lang="en-US" sz="2400" dirty="0">
+                <a:solidFill>
+                  <a:srgbClr val="00B050"/>
+                </a:solidFill>
+                <a:latin typeface="Book Antiqua" pitchFamily="18" charset="0"/>
+              </a:rPr>
+              <a:t>linear</a:t>
+            </a:r>
+            <a:r>
+              <a:rPr lang="en-US" sz="2400" dirty="0">
+                <a:latin typeface="Book Antiqua" pitchFamily="18" charset="0"/>
+              </a:rPr>
+              <a:t>. </a:t>
             </a:r>
           </a:p>
           <a:p>
@@ -4715,7 +4835,43 @@
               <a:rPr lang="en-US" sz="2400" dirty="0">
                 <a:latin typeface="Book Antiqua" pitchFamily="18" charset="0"/>
               </a:rPr>
-              <a:t>Loss function can be different according to need. Basically, cross-entropy or least square loss function is used. Normally, Cross-entropy loss function is used for classification problems whereas least square loss function is used for regression problems.</a:t>
+              <a:t>Loss function can be different according to need. Basically, cross-entropy or least square loss function is used. Normally, </a:t>
+            </a:r>
+            <a:r>
+              <a:rPr lang="en-US" sz="2400" dirty="0">
+                <a:solidFill>
+                  <a:srgbClr val="00B050"/>
+                </a:solidFill>
+                <a:latin typeface="Book Antiqua" pitchFamily="18" charset="0"/>
+              </a:rPr>
+              <a:t>Cross-entropy loss function </a:t>
+            </a:r>
+            <a:r>
+              <a:rPr lang="en-US" sz="2400" dirty="0">
+                <a:solidFill>
+                  <a:srgbClr val="7030A0"/>
+                </a:solidFill>
+                <a:latin typeface="Book Antiqua" pitchFamily="18" charset="0"/>
+              </a:rPr>
+              <a:t>is used for classification problems whereas </a:t>
+            </a:r>
+            <a:r>
+              <a:rPr lang="en-US" sz="2400" dirty="0">
+                <a:solidFill>
+                  <a:srgbClr val="00B050"/>
+                </a:solidFill>
+                <a:latin typeface="Book Antiqua" pitchFamily="18" charset="0"/>
+              </a:rPr>
+              <a:t>least square loss function </a:t>
+            </a:r>
+            <a:r>
+              <a:rPr lang="en-US" sz="2400" dirty="0">
+                <a:solidFill>
+                  <a:srgbClr val="7030A0"/>
+                </a:solidFill>
+                <a:latin typeface="Book Antiqua" pitchFamily="18" charset="0"/>
+              </a:rPr>
+              <a:t>is used for regression problems.</a:t>
             </a:r>
           </a:p>
           <a:p>
@@ -6866,7 +7022,37 @@
               <a:rPr lang="en-US" sz="2400" dirty="0">
                 <a:latin typeface="Book Antiqua" pitchFamily="18" charset="0"/>
               </a:rPr>
-              <a:t> Solution to exploding gradient is gradient clipping and solution to vanishing gradient problem is to use alternate architectures like gated recurrent unit (GRU) network and Long Short-term Memory (LSTM) network. Both, GRU and LSTM are variants of RNN architecture.</a:t>
+              <a:t> Solution to exploding gradient is gradient clipping and solution to vanishing gradient problem is to use alternate architectures like </a:t>
+            </a:r>
+            <a:r>
+              <a:rPr lang="en-US" sz="2400" dirty="0">
+                <a:solidFill>
+                  <a:srgbClr val="00B050"/>
+                </a:solidFill>
+                <a:latin typeface="Book Antiqua" pitchFamily="18" charset="0"/>
+              </a:rPr>
+              <a:t>gated recurrent unit (GRU) network </a:t>
+            </a:r>
+            <a:r>
+              <a:rPr lang="en-US" sz="2400" dirty="0">
+                <a:latin typeface="Book Antiqua" pitchFamily="18" charset="0"/>
+              </a:rPr>
+              <a:t>and </a:t>
+            </a:r>
+            <a:r>
+              <a:rPr lang="en-US" sz="2400" dirty="0">
+                <a:solidFill>
+                  <a:srgbClr val="00B050"/>
+                </a:solidFill>
+                <a:latin typeface="Book Antiqua" pitchFamily="18" charset="0"/>
+              </a:rPr>
+              <a:t>Long Short-term Memory (LSTM) </a:t>
+            </a:r>
+            <a:r>
+              <a:rPr lang="en-US" sz="2400" dirty="0">
+                <a:latin typeface="Book Antiqua" pitchFamily="18" charset="0"/>
+              </a:rPr>
+              <a:t>network. Both, GRU and LSTM are variants of RNN architecture.</a:t>
             </a:r>
           </a:p>
           <a:p>
@@ -6875,7 +7061,16 @@
               <a:rPr lang="en-US" sz="2400" dirty="0">
                 <a:latin typeface="Book Antiqua" pitchFamily="18" charset="0"/>
               </a:rPr>
-              <a:t>Solution to second problem is to used truncated BPTT algorithm</a:t>
+              <a:t>Solution to second problem is to used </a:t>
+            </a:r>
+            <a:r>
+              <a:rPr lang="en-US" sz="2400" dirty="0">
+                <a:solidFill>
+                  <a:srgbClr val="00B050"/>
+                </a:solidFill>
+                <a:latin typeface="Book Antiqua" pitchFamily="18" charset="0"/>
+              </a:rPr>
+              <a:t>truncated BPTT algorithm</a:t>
             </a:r>
           </a:p>
         </p:txBody>
@@ -7498,6 +7693,9 @@
             <a:pPr algn="just"/>
             <a:r>
               <a:rPr lang="en-US" sz="2400" dirty="0">
+                <a:solidFill>
+                  <a:srgbClr val="00B050"/>
+                </a:solidFill>
                 <a:latin typeface="Book Antiqua" pitchFamily="18" charset="0"/>
               </a:rPr>
               <a:t>This modified  version of BPTT algorithm is called Truncated BPTT or TBPTT.</a:t>
@@ -11725,7 +11923,7 @@
           <a:p>
             <a:pPr algn="just"/>
             <a:endParaRPr lang="en-US" sz="2400" dirty="0">
-              <a:latin typeface="Book Antiqua" pitchFamily="18" charset="0"/>
+              <a:latin typeface="Book Antiqua" panose="02040602050305030304" pitchFamily="18" charset="0"/>
             </a:endParaRPr>
           </a:p>
         </p:txBody>
@@ -12058,7 +12256,7 @@
           <a:p>
             <a:pPr algn="just"/>
             <a:endParaRPr lang="en-US" sz="2800" dirty="0">
-              <a:latin typeface="Book Antiqua" pitchFamily="18" charset="0"/>
+              <a:latin typeface="Book Antiqua" panose="02040602050305030304" pitchFamily="18" charset="0"/>
             </a:endParaRPr>
           </a:p>
         </p:txBody>
@@ -15312,7 +15510,7 @@
                 </a:pPr>
                 <a:r>
                   <a:rPr lang="en-US" sz="2800" dirty="0">
-                    <a:latin typeface="Book Antiqua" panose="02040602050305030304" pitchFamily="18" charset="0"/>
+                    <a:latin typeface="Book Antiqua" pitchFamily="18" charset="0"/>
                   </a:rPr>
                   <a:t>Where, </a:t>
                 </a:r>
@@ -15400,7 +15598,7 @@
                   <a:buNone/>
                 </a:pPr>
                 <a:endParaRPr lang="en-US" sz="2800" dirty="0">
-                  <a:latin typeface="Book Antiqua" pitchFamily="18" charset="0"/>
+                  <a:latin typeface="Book Antiqua" panose="02040602050305030304" pitchFamily="18" charset="0"/>
                 </a:endParaRPr>
               </a:p>
             </p:txBody>
@@ -15537,26 +15735,14 @@
               <a:rPr lang="en-US" sz="2800" dirty="0">
                 <a:latin typeface="Book Antiqua" pitchFamily="18" charset="0"/>
               </a:rPr>
-              <a:t>This networks acts as associative </a:t>
-            </a:r>
-            <a:r>
-              <a:rPr lang="en-US" sz="2800">
-                <a:latin typeface="Book Antiqua" pitchFamily="18" charset="0"/>
-              </a:rPr>
-              <a:t>memory or </a:t>
-            </a:r>
+              <a:t>This networks acts as associative memory or content addressable memory and is used for different pattern recognition problem.</a:t>
+            </a:r>
+          </a:p>
+          <a:p>
+            <a:pPr algn="just"/>
             <a:r>
               <a:rPr lang="en-US" sz="2800" dirty="0">
                 <a:latin typeface="Book Antiqua" pitchFamily="18" charset="0"/>
-              </a:rPr>
-              <a:t>content addressable memory and is used for different pattern recognition problem.</a:t>
-            </a:r>
-          </a:p>
-          <a:p>
-            <a:pPr algn="just"/>
-            <a:r>
-              <a:rPr lang="en-US" sz="2800" dirty="0">
-                <a:latin typeface="Book Antiqua" panose="02040602050305030304" pitchFamily="18" charset="0"/>
               </a:rPr>
               <a:t>An associative memory stores a set of p patterns </a:t>
             </a:r>
@@ -15708,13 +15894,13 @@
           <a:p>
             <a:pPr algn="just"/>
             <a:endParaRPr lang="en-US" sz="2800" dirty="0">
-              <a:latin typeface="Book Antiqua" panose="02040602050305030304" pitchFamily="18" charset="0"/>
+              <a:latin typeface="Book Antiqua" pitchFamily="18" charset="0"/>
             </a:endParaRPr>
           </a:p>
           <a:p>
             <a:pPr algn="just"/>
             <a:endParaRPr lang="en-US" sz="2800" dirty="0">
-              <a:latin typeface="Book Antiqua" panose="02040602050305030304" pitchFamily="18" charset="0"/>
+              <a:latin typeface="Book Antiqua" pitchFamily="18" charset="0"/>
             </a:endParaRPr>
           </a:p>
         </p:txBody>
@@ -15975,7 +16161,34 @@
               <a:rPr lang="en-US" sz="2600" dirty="0">
                 <a:latin typeface="Book Antiqua" pitchFamily="18" charset="0"/>
               </a:rPr>
-              <a:t> thus reducing the complexity of increasing parameters and memorizing each previous outputs by </a:t>
+              <a:t> thus </a:t>
+            </a:r>
+            <a:r>
+              <a:rPr lang="en-US" sz="2600" b="1" dirty="0">
+                <a:latin typeface="Book Antiqua" pitchFamily="18" charset="0"/>
+              </a:rPr>
+              <a:t>reducing</a:t>
+            </a:r>
+            <a:r>
+              <a:rPr lang="en-US" sz="2600" dirty="0">
+                <a:latin typeface="Book Antiqua" pitchFamily="18" charset="0"/>
+              </a:rPr>
+              <a:t> the </a:t>
+            </a:r>
+            <a:r>
+              <a:rPr lang="en-US" sz="2600" b="1" dirty="0">
+                <a:solidFill>
+                  <a:srgbClr val="00B050"/>
+                </a:solidFill>
+                <a:latin typeface="Book Antiqua" pitchFamily="18" charset="0"/>
+              </a:rPr>
+              <a:t>complexity</a:t>
+            </a:r>
+            <a:r>
+              <a:rPr lang="en-US" sz="2600" dirty="0">
+                <a:latin typeface="Book Antiqua" pitchFamily="18" charset="0"/>
+              </a:rPr>
+              <a:t> of increasing parameters and memorizing each previous outputs by </a:t>
             </a:r>
             <a:r>
               <a:rPr lang="en-US" sz="2600" i="1" dirty="0">
